--- a/materials/OS-M3/OS-M3-S6-Quarto/OS-M3-S6-Quarto-slides.pptx
+++ b/materials/OS-M3/OS-M3-S6-Quarto/OS-M3-S6-Quarto-slides.pptx
@@ -9307,7 +9307,7 @@
             </a:pPr>
             <a:r>
               <a:rPr/>
-              <a:t>09/01/2026</a:t>
+              <a:t>11/01/2026</a:t>
             </a:r>
           </a:p>
         </p:txBody>

--- a/materials/OS-M3/OS-M3-S6-Quarto/OS-M3-S6-Quarto-slides.pptx
+++ b/materials/OS-M3/OS-M3-S6-Quarto/OS-M3-S6-Quarto-slides.pptx
@@ -9307,7 +9307,7 @@
             </a:pPr>
             <a:r>
               <a:rPr/>
-              <a:t>11/01/2026</a:t>
+              <a:t>16/01/2026</a:t>
             </a:r>
           </a:p>
         </p:txBody>

--- a/materials/OS-M3/OS-M3-S6-Quarto/OS-M3-S6-Quarto-slides.pptx
+++ b/materials/OS-M3/OS-M3-S6-Quarto/OS-M3-S6-Quarto-slides.pptx
@@ -9307,7 +9307,7 @@
             </a:pPr>
             <a:r>
               <a:rPr/>
-              <a:t>16/01/2026</a:t>
+              <a:t>18/01/2026</a:t>
             </a:r>
           </a:p>
         </p:txBody>

--- a/materials/OS-M3/OS-M3-S6-Quarto/OS-M3-S6-Quarto-slides.pptx
+++ b/materials/OS-M3/OS-M3-S6-Quarto/OS-M3-S6-Quarto-slides.pptx
@@ -9307,7 +9307,7 @@
             </a:pPr>
             <a:r>
               <a:rPr/>
-              <a:t>18/01/2026</a:t>
+              <a:t>22/01/2026</a:t>
             </a:r>
           </a:p>
         </p:txBody>

--- a/materials/OS-M3/OS-M3-S6-Quarto/OS-M3-S6-Quarto-slides.pptx
+++ b/materials/OS-M3/OS-M3-S6-Quarto/OS-M3-S6-Quarto-slides.pptx
@@ -9307,7 +9307,7 @@
             </a:pPr>
             <a:r>
               <a:rPr/>
-              <a:t>22/01/2026</a:t>
+              <a:t>23/01/2026</a:t>
             </a:r>
           </a:p>
         </p:txBody>

--- a/materials/OS-M3/OS-M3-S6-Quarto/OS-M3-S6-Quarto-slides.pptx
+++ b/materials/OS-M3/OS-M3-S6-Quarto/OS-M3-S6-Quarto-slides.pptx
@@ -9307,7 +9307,7 @@
             </a:pPr>
             <a:r>
               <a:rPr/>
-              <a:t>23/01/2026</a:t>
+              <a:t>25/01/2026</a:t>
             </a:r>
           </a:p>
         </p:txBody>

--- a/materials/OS-M3/OS-M3-S6-Quarto/OS-M3-S6-Quarto-slides.pptx
+++ b/materials/OS-M3/OS-M3-S6-Quarto/OS-M3-S6-Quarto-slides.pptx
@@ -9307,7 +9307,7 @@
             </a:pPr>
             <a:r>
               <a:rPr/>
-              <a:t>25/01/2026</a:t>
+              <a:t>28/01/2026</a:t>
             </a:r>
           </a:p>
         </p:txBody>

--- a/materials/OS-M3/OS-M3-S6-Quarto/OS-M3-S6-Quarto-slides.pptx
+++ b/materials/OS-M3/OS-M3-S6-Quarto/OS-M3-S6-Quarto-slides.pptx
@@ -12940,7 +12940,7 @@
             </a:pPr>
             <a:r>
               <a:rPr/>
-              <a:t>29/01/2026</a:t>
+              <a:t>01/02/2026</a:t>
             </a:r>
           </a:p>
         </p:txBody>

--- a/materials/OS-M3/OS-M3-S6-Quarto/OS-M3-S6-Quarto-slides.pptx
+++ b/materials/OS-M3/OS-M3-S6-Quarto/OS-M3-S6-Quarto-slides.pptx
@@ -12940,7 +12940,7 @@
             </a:pPr>
             <a:r>
               <a:rPr/>
-              <a:t>01/02/2026</a:t>
+              <a:t>05/02/2026</a:t>
             </a:r>
           </a:p>
         </p:txBody>

--- a/materials/OS-M3/OS-M3-S6-Quarto/OS-M3-S6-Quarto-slides.pptx
+++ b/materials/OS-M3/OS-M3-S6-Quarto/OS-M3-S6-Quarto-slides.pptx
@@ -12940,7 +12940,7 @@
             </a:pPr>
             <a:r>
               <a:rPr/>
-              <a:t>05/02/2026</a:t>
+              <a:t>08/02/2026</a:t>
             </a:r>
           </a:p>
         </p:txBody>

--- a/materials/OS-M3/OS-M3-S6-Quarto/OS-M3-S6-Quarto-slides.pptx
+++ b/materials/OS-M3/OS-M3-S6-Quarto/OS-M3-S6-Quarto-slides.pptx
@@ -12940,7 +12940,7 @@
             </a:pPr>
             <a:r>
               <a:rPr/>
-              <a:t>08/02/2026</a:t>
+              <a:t>11/02/2026</a:t>
             </a:r>
           </a:p>
         </p:txBody>

--- a/materials/OS-M3/OS-M3-S6-Quarto/OS-M3-S6-Quarto-slides.pptx
+++ b/materials/OS-M3/OS-M3-S6-Quarto/OS-M3-S6-Quarto-slides.pptx
@@ -12940,7 +12940,7 @@
             </a:pPr>
             <a:r>
               <a:rPr/>
-              <a:t>11/02/2026</a:t>
+              <a:t>12/02/2026</a:t>
             </a:r>
           </a:p>
         </p:txBody>

--- a/materials/OS-M3/OS-M3-S6-Quarto/OS-M3-S6-Quarto-slides.pptx
+++ b/materials/OS-M3/OS-M3-S6-Quarto/OS-M3-S6-Quarto-slides.pptx
@@ -12940,7 +12940,7 @@
             </a:pPr>
             <a:r>
               <a:rPr/>
-              <a:t>12/02/2026</a:t>
+              <a:t>13/02/2026</a:t>
             </a:r>
           </a:p>
         </p:txBody>

--- a/materials/OS-M3/OS-M3-S6-Quarto/OS-M3-S6-Quarto-slides.pptx
+++ b/materials/OS-M3/OS-M3-S6-Quarto/OS-M3-S6-Quarto-slides.pptx
@@ -12940,7 +12940,7 @@
             </a:pPr>
             <a:r>
               <a:rPr/>
-              <a:t>13/02/2026</a:t>
+              <a:t>15/02/2026</a:t>
             </a:r>
           </a:p>
         </p:txBody>

--- a/materials/OS-M3/OS-M3-S6-Quarto/OS-M3-S6-Quarto-slides.pptx
+++ b/materials/OS-M3/OS-M3-S6-Quarto/OS-M3-S6-Quarto-slides.pptx
@@ -12940,7 +12940,7 @@
             </a:pPr>
             <a:r>
               <a:rPr/>
-              <a:t>15/02/2026</a:t>
+              <a:t>18/02/2026</a:t>
             </a:r>
           </a:p>
         </p:txBody>

--- a/materials/OS-M3/OS-M3-S6-Quarto/OS-M3-S6-Quarto-slides.pptx
+++ b/materials/OS-M3/OS-M3-S6-Quarto/OS-M3-S6-Quarto-slides.pptx
@@ -608,7 +608,7 @@
             </a:pPr>
             <a:r>
               <a:rPr b="1"/>
-              <a:t>Speaker Notes</a:t>
+              <a:t>Presenter Notes</a:t>
             </a:r>
             <a:r>
               <a:rPr/>
@@ -708,7 +708,7 @@
             </a:pPr>
             <a:r>
               <a:rPr b="1"/>
-              <a:t>Speaker Notes</a:t>
+              <a:t>Presenter Notes</a:t>
             </a:r>
             <a:r>
               <a:rPr/>
@@ -936,7 +936,7 @@
             </a:pPr>
             <a:r>
               <a:rPr b="1"/>
-              <a:t>Speaker Notes</a:t>
+              <a:t>Presenter Notes</a:t>
             </a:r>
             <a:r>
               <a:rPr/>
@@ -1040,7 +1040,7 @@
             </a:pPr>
             <a:r>
               <a:rPr b="1"/>
-              <a:t>Speaker Notes</a:t>
+              <a:t>Presenter Notes</a:t>
             </a:r>
             <a:r>
               <a:rPr/>
@@ -1216,7 +1216,7 @@
             </a:pPr>
             <a:r>
               <a:rPr b="1"/>
-              <a:t>Speaker Notes</a:t>
+              <a:t>Presenter Notes</a:t>
             </a:r>
             <a:r>
               <a:rPr/>
@@ -1392,7 +1392,7 @@
             </a:pPr>
             <a:r>
               <a:rPr b="1"/>
-              <a:t>Speaker Notes</a:t>
+              <a:t>Presenter Notes</a:t>
             </a:r>
             <a:r>
               <a:rPr/>
@@ -1496,7 +1496,7 @@
             </a:pPr>
             <a:r>
               <a:rPr b="1"/>
-              <a:t>Speaker Notes</a:t>
+              <a:t>Presenter Notes</a:t>
             </a:r>
             <a:r>
               <a:rPr/>
@@ -1582,7 +1582,7 @@
             </a:pPr>
             <a:r>
               <a:rPr b="1"/>
-              <a:t>Speaker Notes</a:t>
+              <a:t>Presenter Notes</a:t>
             </a:r>
             <a:r>
               <a:rPr/>
@@ -1710,7 +1710,7 @@
             </a:pPr>
             <a:r>
               <a:rPr b="1"/>
-              <a:t>Speaker Notes</a:t>
+              <a:t>Presenter Notes</a:t>
             </a:r>
             <a:r>
               <a:rPr/>
@@ -1862,7 +1862,7 @@
             </a:pPr>
             <a:r>
               <a:rPr b="1"/>
-              <a:t>Speaker Notes</a:t>
+              <a:t>Presenter Notes</a:t>
             </a:r>
             <a:r>
               <a:rPr/>
@@ -1998,7 +1998,7 @@
             </a:pPr>
             <a:r>
               <a:rPr b="1"/>
-              <a:t>Speaker Notes</a:t>
+              <a:t>Presenter Notes</a:t>
             </a:r>
             <a:r>
               <a:rPr/>
@@ -2084,7 +2084,7 @@
             </a:pPr>
             <a:r>
               <a:rPr b="1"/>
-              <a:t>Speaker Notes</a:t>
+              <a:t>Presenter Notes</a:t>
             </a:r>
             <a:r>
               <a:rPr/>
@@ -2092,11 +2092,11 @@
             </a:r>
             <a:r>
               <a:rPr b="1"/>
-              <a:t>speaker notes</a:t>
-            </a:r>
-            <a:r>
-              <a:rPr/>
-              <a:t>. You will a script for the presenter for every slide. In presentation mode, your audience will not be able to see these speaker notes, they are only visible to the presenter.</a:t>
+              <a:t>presenter notes</a:t>
+            </a:r>
+            <a:r>
+              <a:rPr/>
+              <a:t>. You will a script for the presenter for every slide. In presentation mode, your audience will not be able to see these presenter notes, they are only visible to the presenter.</a:t>
             </a:r>
           </a:p>
           <a:p>
@@ -2122,7 +2122,7 @@
             </a:r>
             <a:r>
               <a:rPr/>
-              <a:t>. For some slides, there will be pedagogical tips, suggestons for acitivities and troubleshooting tips for issues your audience might run into. You can find these notes underneath the speaker notes.</a:t>
+              <a:t>. For some slides, there will be pedagogical tips, suggestons for acitivities and troubleshooting tips for issues your audience might run into. You can find these notes underneath the presenter notes.</a:t>
             </a:r>
           </a:p>
           <a:p>
@@ -2222,7 +2222,7 @@
             </a:pPr>
             <a:r>
               <a:rPr b="1"/>
-              <a:t>Speaker Notes</a:t>
+              <a:t>Presenter Notes</a:t>
             </a:r>
             <a:r>
               <a:rPr/>
@@ -2326,7 +2326,7 @@
             </a:pPr>
             <a:r>
               <a:rPr b="1"/>
-              <a:t>Speaker Notes</a:t>
+              <a:t>Presenter Notes</a:t>
             </a:r>
             <a:r>
               <a:rPr/>
@@ -2470,7 +2470,7 @@
             </a:pPr>
             <a:r>
               <a:rPr b="1"/>
-              <a:t>Speaker Notes</a:t>
+              <a:t>Presenter Notes</a:t>
             </a:r>
             <a:r>
               <a:rPr/>
@@ -2626,7 +2626,7 @@
             </a:pPr>
             <a:r>
               <a:rPr b="1"/>
-              <a:t>Speaker Notes</a:t>
+              <a:t>Presenter Notes</a:t>
             </a:r>
             <a:r>
               <a:rPr/>
@@ -2766,7 +2766,7 @@
             </a:pPr>
             <a:r>
               <a:rPr b="1"/>
-              <a:t>Speaker Notes</a:t>
+              <a:t>Presenter Notes</a:t>
             </a:r>
             <a:r>
               <a:rPr/>
@@ -2870,7 +2870,7 @@
             </a:pPr>
             <a:r>
               <a:rPr b="1"/>
-              <a:t>Speaker Notes</a:t>
+              <a:t>Presenter Notes</a:t>
             </a:r>
             <a:r>
               <a:rPr/>
@@ -3043,7 +3043,7 @@
             </a:pPr>
             <a:r>
               <a:rPr b="1"/>
-              <a:t>Speaker Notes</a:t>
+              <a:t>Presenter Notes</a:t>
             </a:r>
             <a:r>
               <a:rPr/>
@@ -3159,7 +3159,7 @@
             </a:pPr>
             <a:r>
               <a:rPr b="1"/>
-              <a:t>Speaker Notes</a:t>
+              <a:t>Presenter Notes</a:t>
             </a:r>
             <a:r>
               <a:rPr/>
@@ -3309,7 +3309,7 @@
             </a:pPr>
             <a:r>
               <a:rPr b="1"/>
-              <a:t>Speaker Notes</a:t>
+              <a:t>Presenter Notes</a:t>
             </a:r>
             <a:r>
               <a:rPr/>
@@ -3533,7 +3533,7 @@
             </a:pPr>
             <a:r>
               <a:rPr b="1"/>
-              <a:t>Speaker Notes</a:t>
+              <a:t>Presenter Notes</a:t>
             </a:r>
             <a:r>
               <a:rPr/>
@@ -3637,7 +3637,7 @@
             </a:pPr>
             <a:r>
               <a:rPr b="1"/>
-              <a:t>Speaker Notes</a:t>
+              <a:t>Presenter Notes</a:t>
             </a:r>
             <a:r>
               <a:rPr/>
@@ -3741,7 +3741,7 @@
             </a:pPr>
             <a:r>
               <a:rPr b="1"/>
-              <a:t>Speaker Notes</a:t>
+              <a:t>Presenter Notes</a:t>
             </a:r>
             <a:r>
               <a:rPr/>
@@ -3869,7 +3869,7 @@
             </a:pPr>
             <a:r>
               <a:rPr b="1"/>
-              <a:t>Speaker Notes</a:t>
+              <a:t>Presenter Notes</a:t>
             </a:r>
             <a:r>
               <a:rPr/>
@@ -3973,7 +3973,7 @@
             </a:pPr>
             <a:r>
               <a:rPr b="1"/>
-              <a:t>Speaker Notes</a:t>
+              <a:t>Presenter Notes</a:t>
             </a:r>
             <a:r>
               <a:rPr/>
@@ -4087,7 +4087,7 @@
             </a:pPr>
             <a:r>
               <a:rPr b="1"/>
-              <a:t>Speaker Notes</a:t>
+              <a:t>Presenter Notes</a:t>
             </a:r>
             <a:r>
               <a:rPr/>
@@ -4261,7 +4261,7 @@
             </a:pPr>
             <a:r>
               <a:rPr b="1"/>
-              <a:t>Speaker Notes</a:t>
+              <a:t>Presenter Notes</a:t>
             </a:r>
             <a:r>
               <a:rPr/>
@@ -4725,7 +4725,7 @@
             </a:pPr>
             <a:r>
               <a:rPr b="1"/>
-              <a:t>Speaker Notes</a:t>
+              <a:t>Presenter Notes</a:t>
             </a:r>
             <a:r>
               <a:rPr/>
@@ -4829,7 +4829,7 @@
             </a:pPr>
             <a:r>
               <a:rPr b="1"/>
-              <a:t>Speaker Notes</a:t>
+              <a:t>Presenter Notes</a:t>
             </a:r>
             <a:r>
               <a:rPr/>
@@ -4969,7 +4969,7 @@
             </a:pPr>
             <a:r>
               <a:rPr b="1"/>
-              <a:t>Speaker Notes</a:t>
+              <a:t>Presenter Notes</a:t>
             </a:r>
             <a:r>
               <a:rPr/>
@@ -5073,7 +5073,7 @@
             </a:pPr>
             <a:r>
               <a:rPr b="1"/>
-              <a:t>Speaker Notes</a:t>
+              <a:t>Presenter Notes</a:t>
             </a:r>
             <a:r>
               <a:rPr/>
@@ -5159,7 +5159,7 @@
             </a:pPr>
             <a:r>
               <a:rPr b="1"/>
-              <a:t>Speaker Notes</a:t>
+              <a:t>Presenter Notes</a:t>
             </a:r>
             <a:r>
               <a:rPr/>
@@ -5271,7 +5271,7 @@
             </a:pPr>
             <a:r>
               <a:rPr b="1"/>
-              <a:t>Speaker Notes</a:t>
+              <a:t>Presenter Notes</a:t>
             </a:r>
             <a:r>
               <a:rPr/>
@@ -5395,7 +5395,7 @@
             </a:pPr>
             <a:r>
               <a:rPr b="1"/>
-              <a:t>Speaker Notes</a:t>
+              <a:t>Presenter Notes</a:t>
             </a:r>
             <a:r>
               <a:rPr/>
@@ -5481,7 +5481,7 @@
             </a:pPr>
             <a:r>
               <a:rPr b="1"/>
-              <a:t>Speaker Notes</a:t>
+              <a:t>Presenter Notes</a:t>
             </a:r>
             <a:r>
               <a:rPr/>
@@ -5585,7 +5585,7 @@
             </a:pPr>
             <a:r>
               <a:rPr b="1"/>
-              <a:t>Speaker Notes</a:t>
+              <a:t>Presenter Notes</a:t>
             </a:r>
             <a:r>
               <a:rPr/>
@@ -5689,7 +5689,7 @@
             </a:pPr>
             <a:r>
               <a:rPr b="1"/>
-              <a:t>Speaker Notes</a:t>
+              <a:t>Presenter Notes</a:t>
             </a:r>
             <a:r>
               <a:rPr/>
@@ -5785,7 +5785,7 @@
             </a:pPr>
             <a:r>
               <a:rPr b="1"/>
-              <a:t>Speaker Notes</a:t>
+              <a:t>Presenter Notes</a:t>
             </a:r>
             <a:r>
               <a:rPr/>
@@ -5889,7 +5889,7 @@
             </a:pPr>
             <a:r>
               <a:rPr b="1"/>
-              <a:t>Speaker Notes</a:t>
+              <a:t>Presenter Notes</a:t>
             </a:r>
             <a:r>
               <a:rPr/>
@@ -6361,7 +6361,7 @@
             </a:pPr>
             <a:r>
               <a:rPr b="1"/>
-              <a:t>Speaker Notes</a:t>
+              <a:t>Presenter Notes</a:t>
             </a:r>
             <a:r>
               <a:rPr/>
@@ -6447,7 +6447,7 @@
             </a:pPr>
             <a:r>
               <a:rPr b="1"/>
-              <a:t>Speaker Notes</a:t>
+              <a:t>Presenter Notes</a:t>
             </a:r>
             <a:r>
               <a:rPr/>
@@ -6545,7 +6545,7 @@
             </a:pPr>
             <a:r>
               <a:rPr b="1"/>
-              <a:t>Speaker Notes</a:t>
+              <a:t>Presenter Notes</a:t>
             </a:r>
             <a:r>
               <a:rPr/>
@@ -6631,7 +6631,7 @@
             </a:pPr>
             <a:r>
               <a:rPr b="1"/>
-              <a:t>Speaker Notes</a:t>
+              <a:t>Presenter Notes</a:t>
             </a:r>
             <a:r>
               <a:rPr/>
@@ -6717,7 +6717,7 @@
             </a:pPr>
             <a:r>
               <a:rPr b="1"/>
-              <a:t>Speaker Notes</a:t>
+              <a:t>Presenter Notes</a:t>
             </a:r>
             <a:r>
               <a:rPr/>
@@ -6873,7 +6873,7 @@
             </a:pPr>
             <a:r>
               <a:rPr b="1"/>
-              <a:t>Speaker Notes</a:t>
+              <a:t>Presenter Notes</a:t>
             </a:r>
             <a:r>
               <a:rPr/>
@@ -6991,7 +6991,7 @@
             </a:pPr>
             <a:r>
               <a:rPr b="1"/>
-              <a:t>Speaker Notes</a:t>
+              <a:t>Presenter Notes</a:t>
             </a:r>
             <a:r>
               <a:rPr/>
@@ -7131,7 +7131,7 @@
             </a:pPr>
             <a:r>
               <a:rPr b="1"/>
-              <a:t>Speaker Notes</a:t>
+              <a:t>Presenter Notes</a:t>
             </a:r>
             <a:r>
               <a:rPr/>
@@ -7235,7 +7235,7 @@
             </a:pPr>
             <a:r>
               <a:rPr b="1"/>
-              <a:t>Speaker Notes</a:t>
+              <a:t>Presenter Notes</a:t>
             </a:r>
             <a:r>
               <a:rPr/>
@@ -7369,7 +7369,7 @@
             </a:pPr>
             <a:r>
               <a:rPr b="1"/>
-              <a:t>Speaker Notes</a:t>
+              <a:t>Presenter Notes</a:t>
             </a:r>
             <a:r>
               <a:rPr/>
@@ -7455,7 +7455,7 @@
             </a:pPr>
             <a:r>
               <a:rPr b="1"/>
-              <a:t>Speaker Notes</a:t>
+              <a:t>Presenter Notes</a:t>
             </a:r>
             <a:r>
               <a:rPr/>
@@ -7573,7 +7573,7 @@
             </a:pPr>
             <a:r>
               <a:rPr b="1"/>
-              <a:t>Speaker Notes</a:t>
+              <a:t>Presenter Notes</a:t>
             </a:r>
             <a:r>
               <a:rPr/>
@@ -8196,7 +8196,7 @@
             </a:pPr>
             <a:r>
               <a:rPr b="1"/>
-              <a:t>Speaker Notes</a:t>
+              <a:t>Presenter Notes</a:t>
             </a:r>
             <a:r>
               <a:rPr/>
@@ -8354,7 +8354,7 @@
             </a:pPr>
             <a:r>
               <a:rPr b="1"/>
-              <a:t>Speaker Notes</a:t>
+              <a:t>Presenter Notes</a:t>
             </a:r>
             <a:r>
               <a:rPr/>
@@ -8522,7 +8522,7 @@
             </a:pPr>
             <a:r>
               <a:rPr b="1"/>
-              <a:t>Speaker Notes</a:t>
+              <a:t>Presenter Notes</a:t>
             </a:r>
             <a:r>
               <a:rPr/>
@@ -8646,7 +8646,7 @@
             </a:pPr>
             <a:r>
               <a:rPr b="1"/>
-              <a:t>Speaker Notes</a:t>
+              <a:t>Presenter Notes</a:t>
             </a:r>
             <a:r>
               <a:rPr/>
@@ -8778,7 +8778,7 @@
             </a:pPr>
             <a:r>
               <a:rPr b="1"/>
-              <a:t>Speaker Notes</a:t>
+              <a:t>Presenter Notes</a:t>
             </a:r>
             <a:r>
               <a:rPr/>
@@ -9102,7 +9102,7 @@
             </a:pPr>
             <a:r>
               <a:rPr b="1"/>
-              <a:t>Speaker Notes</a:t>
+              <a:t>Presenter Notes</a:t>
             </a:r>
             <a:r>
               <a:rPr/>
@@ -9206,7 +9206,7 @@
             </a:pPr>
             <a:r>
               <a:rPr b="1"/>
-              <a:t>Speaker Notes</a:t>
+              <a:t>Presenter Notes</a:t>
             </a:r>
             <a:r>
               <a:rPr/>
@@ -9346,7 +9346,7 @@
             </a:pPr>
             <a:r>
               <a:rPr b="1"/>
-              <a:t>Speaker Notes</a:t>
+              <a:t>Presenter Notes</a:t>
             </a:r>
             <a:r>
               <a:rPr/>
@@ -9450,7 +9450,7 @@
             </a:pPr>
             <a:r>
               <a:rPr b="1"/>
-              <a:t>Speaker Notes</a:t>
+              <a:t>Presenter Notes</a:t>
             </a:r>
             <a:r>
               <a:rPr/>
@@ -9554,7 +9554,7 @@
             </a:pPr>
             <a:r>
               <a:rPr b="1"/>
-              <a:t>Speaker Notes</a:t>
+              <a:t>Presenter Notes</a:t>
             </a:r>
             <a:r>
               <a:rPr/>
@@ -9692,7 +9692,7 @@
             </a:pPr>
             <a:r>
               <a:rPr b="1"/>
-              <a:t>Speaker Notes</a:t>
+              <a:t>Presenter Notes</a:t>
             </a:r>
             <a:r>
               <a:rPr/>
@@ -9796,7 +9796,7 @@
             </a:pPr>
             <a:r>
               <a:rPr b="1"/>
-              <a:t>Speaker Notes</a:t>
+              <a:t>Presenter Notes</a:t>
             </a:r>
             <a:r>
               <a:rPr/>

--- a/materials/OS-M3/OS-M3-S6-Quarto/OS-M3-S6-Quarto-slides.pptx
+++ b/materials/OS-M3/OS-M3-S6-Quarto/OS-M3-S6-Quarto-slides.pptx
@@ -12940,7 +12940,7 @@
             </a:pPr>
             <a:r>
               <a:rPr/>
-              <a:t>18/02/2026</a:t>
+              <a:t>22/02/2026</a:t>
             </a:r>
           </a:p>
         </p:txBody>

--- a/materials/OS-M3/OS-M3-S6-Quarto/OS-M3-S6-Quarto-slides.pptx
+++ b/materials/OS-M3/OS-M3-S6-Quarto/OS-M3-S6-Quarto-slides.pptx
@@ -12940,7 +12940,7 @@
             </a:pPr>
             <a:r>
               <a:rPr/>
-              <a:t>22/02/2026</a:t>
+              <a:t>01/03/2026</a:t>
             </a:r>
           </a:p>
         </p:txBody>

--- a/materials/OS-M3/OS-M3-S6-Quarto/OS-M3-S6-Quarto-slides.pptx
+++ b/materials/OS-M3/OS-M3-S6-Quarto/OS-M3-S6-Quarto-slides.pptx
@@ -12940,7 +12940,7 @@
             </a:pPr>
             <a:r>
               <a:rPr/>
-              <a:t>01/03/2026</a:t>
+              <a:t>04/03/2026</a:t>
             </a:r>
           </a:p>
         </p:txBody>

--- a/materials/OS-M3/OS-M3-S6-Quarto/OS-M3-S6-Quarto-slides.pptx
+++ b/materials/OS-M3/OS-M3-S6-Quarto/OS-M3-S6-Quarto-slides.pptx
@@ -12940,7 +12940,7 @@
             </a:pPr>
             <a:r>
               <a:rPr/>
-              <a:t>04/03/2026</a:t>
+              <a:t>05/03/2026</a:t>
             </a:r>
           </a:p>
         </p:txBody>

--- a/materials/OS-M3/OS-M3-S6-Quarto/OS-M3-S6-Quarto-slides.pptx
+++ b/materials/OS-M3/OS-M3-S6-Quarto/OS-M3-S6-Quarto-slides.pptx
@@ -12940,7 +12940,7 @@
             </a:pPr>
             <a:r>
               <a:rPr/>
-              <a:t>05/03/2026</a:t>
+              <a:t>08/03/2026</a:t>
             </a:r>
           </a:p>
         </p:txBody>

--- a/materials/OS-M3/OS-M3-S6-Quarto/OS-M3-S6-Quarto-slides.pptx
+++ b/materials/OS-M3/OS-M3-S6-Quarto/OS-M3-S6-Quarto-slides.pptx
@@ -12940,7 +12940,7 @@
             </a:pPr>
             <a:r>
               <a:rPr/>
-              <a:t>08/03/2026</a:t>
+              <a:t>11/03/2026</a:t>
             </a:r>
           </a:p>
         </p:txBody>

--- a/materials/OS-M3/OS-M3-S6-Quarto/OS-M3-S6-Quarto-slides.pptx
+++ b/materials/OS-M3/OS-M3-S6-Quarto/OS-M3-S6-Quarto-slides.pptx
@@ -12940,7 +12940,7 @@
             </a:pPr>
             <a:r>
               <a:rPr/>
-              <a:t>11/03/2026</a:t>
+              <a:t>12/03/2026</a:t>
             </a:r>
           </a:p>
         </p:txBody>

--- a/materials/OS-M3/OS-M3-S6-Quarto/OS-M3-S6-Quarto-slides.pptx
+++ b/materials/OS-M3/OS-M3-S6-Quarto/OS-M3-S6-Quarto-slides.pptx
@@ -12940,7 +12940,7 @@
             </a:pPr>
             <a:r>
               <a:rPr/>
-              <a:t>12/03/2026</a:t>
+              <a:t>15/03/2026</a:t>
             </a:r>
           </a:p>
         </p:txBody>

--- a/materials/OS-M3/OS-M3-S6-Quarto/OS-M3-S6-Quarto-slides.pptx
+++ b/materials/OS-M3/OS-M3-S6-Quarto/OS-M3-S6-Quarto-slides.pptx
@@ -12940,7 +12940,7 @@
             </a:pPr>
             <a:r>
               <a:rPr/>
-              <a:t>15/03/2026</a:t>
+              <a:t>19/03/2026</a:t>
             </a:r>
           </a:p>
         </p:txBody>

--- a/materials/OS-M3/OS-M3-S6-Quarto/OS-M3-S6-Quarto-slides.pptx
+++ b/materials/OS-M3/OS-M3-S6-Quarto/OS-M3-S6-Quarto-slides.pptx
@@ -12911,8 +12911,6 @@
             <a:pPr lvl="0" indent="0" marL="0">
               <a:buNone/>
             </a:pPr>
-            <a:br/>
-            <a:br/>
             <a:r>
               <a:rPr/>
               <a:t>Elizabeth Waterfield</a:t>
@@ -12940,7 +12938,7 @@
             </a:pPr>
             <a:r>
               <a:rPr/>
-              <a:t>19/03/2026</a:t>
+              <a:t>22/03/2026</a:t>
             </a:r>
           </a:p>
         </p:txBody>
@@ -15149,7 +15147,9 @@
         <p:nvSpPr>
           <p:cNvPr id="1" name="TextBox 3"/>
           <p:cNvSpPr txBox="1"/>
-          <p:nvPr/>
+          <p:nvPr>
+            <p:ph idx="1"/>
+          </p:nvPr>
         </p:nvSpPr>
         <p:spPr>
           <a:xfrm>
@@ -19481,7 +19481,9 @@
         <p:nvSpPr>
           <p:cNvPr id="1" name="TextBox 3"/>
           <p:cNvSpPr txBox="1"/>
-          <p:nvPr/>
+          <p:nvPr>
+            <p:ph idx="1"/>
+          </p:nvPr>
         </p:nvSpPr>
         <p:spPr>
           <a:xfrm>

--- a/materials/OS-M3/OS-M3-S6-Quarto/OS-M3-S6-Quarto-slides.pptx
+++ b/materials/OS-M3/OS-M3-S6-Quarto/OS-M3-S6-Quarto-slides.pptx
@@ -12938,7 +12938,7 @@
             </a:pPr>
             <a:r>
               <a:rPr/>
-              <a:t>22/03/2026</a:t>
+              <a:t>29/03/2026</a:t>
             </a:r>
           </a:p>
         </p:txBody>

--- a/materials/OS-M3/OS-M3-S6-Quarto/OS-M3-S6-Quarto-slides.pptx
+++ b/materials/OS-M3/OS-M3-S6-Quarto/OS-M3-S6-Quarto-slides.pptx
@@ -12938,7 +12938,7 @@
             </a:pPr>
             <a:r>
               <a:rPr/>
-              <a:t>29/03/2026</a:t>
+              <a:t>01/04/2026</a:t>
             </a:r>
           </a:p>
         </p:txBody>

--- a/materials/OS-M3/OS-M3-S6-Quarto/OS-M3-S6-Quarto-slides.pptx
+++ b/materials/OS-M3/OS-M3-S6-Quarto/OS-M3-S6-Quarto-slides.pptx
@@ -12938,7 +12938,7 @@
             </a:pPr>
             <a:r>
               <a:rPr/>
-              <a:t>01/04/2026</a:t>
+              <a:t>05/04/2026</a:t>
             </a:r>
           </a:p>
         </p:txBody>

--- a/materials/OS-M3/OS-M3-S6-Quarto/OS-M3-S6-Quarto-slides.pptx
+++ b/materials/OS-M3/OS-M3-S6-Quarto/OS-M3-S6-Quarto-slides.pptx
@@ -12938,7 +12938,7 @@
             </a:pPr>
             <a:r>
               <a:rPr/>
-              <a:t>05/04/2026</a:t>
+              <a:t>08/04/2026</a:t>
             </a:r>
           </a:p>
         </p:txBody>

--- a/materials/OS-M3/OS-M3-S6-Quarto/OS-M3-S6-Quarto-slides.pptx
+++ b/materials/OS-M3/OS-M3-S6-Quarto/OS-M3-S6-Quarto-slides.pptx
@@ -2096,7 +2096,7 @@
             </a:r>
             <a:r>
               <a:rPr/>
-              <a:t>. You will a script for the presenter for every slide. In presentation mode, your audience will not be able to see these presenter notes, they are only visible to the presenter.</a:t>
+              <a:t>. You will find a script for the presenter for every slide. In presentation mode, your audience will not be able to see these presenter notes, they are only visible to the presenter.</a:t>
             </a:r>
           </a:p>
           <a:p>
@@ -12938,7 +12938,7 @@
             </a:pPr>
             <a:r>
               <a:rPr/>
-              <a:t>08/04/2026</a:t>
+              <a:t>10/04/2026</a:t>
             </a:r>
           </a:p>
         </p:txBody>
@@ -16727,7 +16727,7 @@
             </a:pPr>
             <a:r>
               <a:rPr sz="2000"/>
-              <a:t>Here is a link to a list of the different output formats.</a:t>
+              <a:t>Here is a link to a list of the different output formats, including PDF, docx, ePub for e-book readers, pptx, and much more.</a:t>
             </a:r>
           </a:p>
         </p:txBody>
@@ -18128,6 +18128,344 @@
               <a:t>two separate code chunks</a:t>
             </a:r>
           </a:p>
+          <a:p>
+            <a:pPr lvl="0" indent="0" marL="0">
+              <a:buNone/>
+            </a:pPr>
+            <a:r>
+              <a:rPr/>
+              <a:t>. . .</a:t>
+            </a:r>
+          </a:p>
+          <a:p>
+            <a:pPr lvl="0" indent="0" marL="0">
+              <a:buNone/>
+            </a:pPr>
+            <a:r>
+              <a:rPr/>
+              <a:t>It should look like this:</a:t>
+            </a:r>
+          </a:p>
+          <a:p>
+            <a:pPr lvl="0" indent="0">
+              <a:buNone/>
+            </a:pPr>
+            <a:r>
+              <a:rPr>
+                <a:solidFill>
+                  <a:srgbClr val="5E5E5E"/>
+                </a:solidFill>
+                <a:latin typeface="Courier"/>
+              </a:rPr>
+              <a:t>```{r}</a:t>
+            </a:r>
+            <a:br/>
+            <a:r>
+              <a:rPr>
+                <a:solidFill>
+                  <a:srgbClr val="4758AB"/>
+                </a:solidFill>
+                <a:latin typeface="Courier"/>
+              </a:rPr>
+              <a:t>summary</a:t>
+            </a:r>
+            <a:r>
+              <a:rPr>
+                <a:solidFill>
+                  <a:srgbClr val="003B4F"/>
+                </a:solidFill>
+                <a:latin typeface="Courier"/>
+              </a:rPr>
+              <a:t>(ChickWeight)</a:t>
+            </a:r>
+            <a:br/>
+            <a:r>
+              <a:rPr>
+                <a:solidFill>
+                  <a:srgbClr val="5E5E5E"/>
+                </a:solidFill>
+                <a:latin typeface="Courier"/>
+              </a:rPr>
+              <a:t>```</a:t>
+            </a:r>
+            <a:br/>
+            <a:br/>
+            <a:r>
+              <a:rPr>
+                <a:solidFill>
+                  <a:srgbClr val="5E5E5E"/>
+                </a:solidFill>
+                <a:latin typeface="Courier"/>
+              </a:rPr>
+              <a:t>```{r}</a:t>
+            </a:r>
+            <a:br/>
+            <a:r>
+              <a:rPr>
+                <a:solidFill>
+                  <a:srgbClr val="4758AB"/>
+                </a:solidFill>
+                <a:latin typeface="Courier"/>
+              </a:rPr>
+              <a:t>library</a:t>
+            </a:r>
+            <a:r>
+              <a:rPr>
+                <a:solidFill>
+                  <a:srgbClr val="003B4F"/>
+                </a:solidFill>
+                <a:latin typeface="Courier"/>
+              </a:rPr>
+              <a:t>(ggplot2)</a:t>
+            </a:r>
+            <a:br/>
+            <a:r>
+              <a:rPr>
+                <a:solidFill>
+                  <a:srgbClr val="4758AB"/>
+                </a:solidFill>
+                <a:latin typeface="Courier"/>
+              </a:rPr>
+              <a:t>ggplot</a:t>
+            </a:r>
+            <a:r>
+              <a:rPr>
+                <a:solidFill>
+                  <a:srgbClr val="003B4F"/>
+                </a:solidFill>
+                <a:latin typeface="Courier"/>
+              </a:rPr>
+              <a:t>(ChickWeight, </a:t>
+            </a:r>
+            <a:r>
+              <a:rPr>
+                <a:solidFill>
+                  <a:srgbClr val="4758AB"/>
+                </a:solidFill>
+                <a:latin typeface="Courier"/>
+              </a:rPr>
+              <a:t>aes</a:t>
+            </a:r>
+            <a:r>
+              <a:rPr>
+                <a:solidFill>
+                  <a:srgbClr val="003B4F"/>
+                </a:solidFill>
+                <a:latin typeface="Courier"/>
+              </a:rPr>
+              <a:t>(</a:t>
+            </a:r>
+            <a:r>
+              <a:rPr>
+                <a:solidFill>
+                  <a:srgbClr val="657422"/>
+                </a:solidFill>
+                <a:latin typeface="Courier"/>
+              </a:rPr>
+              <a:t>x =</a:t>
+            </a:r>
+            <a:r>
+              <a:rPr>
+                <a:solidFill>
+                  <a:srgbClr val="003B4F"/>
+                </a:solidFill>
+                <a:latin typeface="Courier"/>
+              </a:rPr>
+              <a:t> Time, </a:t>
+            </a:r>
+            <a:r>
+              <a:rPr>
+                <a:solidFill>
+                  <a:srgbClr val="657422"/>
+                </a:solidFill>
+                <a:latin typeface="Courier"/>
+              </a:rPr>
+              <a:t>y =</a:t>
+            </a:r>
+            <a:r>
+              <a:rPr>
+                <a:solidFill>
+                  <a:srgbClr val="003B4F"/>
+                </a:solidFill>
+                <a:latin typeface="Courier"/>
+              </a:rPr>
+              <a:t> weight, </a:t>
+            </a:r>
+            <a:r>
+              <a:rPr>
+                <a:solidFill>
+                  <a:srgbClr val="657422"/>
+                </a:solidFill>
+                <a:latin typeface="Courier"/>
+              </a:rPr>
+              <a:t>color =</a:t>
+            </a:r>
+            <a:r>
+              <a:rPr>
+                <a:solidFill>
+                  <a:srgbClr val="003B4F"/>
+                </a:solidFill>
+                <a:latin typeface="Courier"/>
+              </a:rPr>
+              <a:t> Diet)) </a:t>
+            </a:r>
+            <a:r>
+              <a:rPr>
+                <a:solidFill>
+                  <a:srgbClr val="5E5E5E"/>
+                </a:solidFill>
+                <a:latin typeface="Courier"/>
+              </a:rPr>
+              <a:t>+</a:t>
+            </a:r>
+            <a:br/>
+            <a:r>
+              <a:rPr>
+                <a:solidFill>
+                  <a:srgbClr val="003B4F"/>
+                </a:solidFill>
+                <a:latin typeface="Courier"/>
+              </a:rPr>
+              <a:t>  </a:t>
+            </a:r>
+            <a:r>
+              <a:rPr>
+                <a:solidFill>
+                  <a:srgbClr val="4758AB"/>
+                </a:solidFill>
+                <a:latin typeface="Courier"/>
+              </a:rPr>
+              <a:t>geom_line</a:t>
+            </a:r>
+            <a:r>
+              <a:rPr>
+                <a:solidFill>
+                  <a:srgbClr val="003B4F"/>
+                </a:solidFill>
+                <a:latin typeface="Courier"/>
+              </a:rPr>
+              <a:t>(</a:t>
+            </a:r>
+            <a:r>
+              <a:rPr>
+                <a:solidFill>
+                  <a:srgbClr val="4758AB"/>
+                </a:solidFill>
+                <a:latin typeface="Courier"/>
+              </a:rPr>
+              <a:t>aes</a:t>
+            </a:r>
+            <a:r>
+              <a:rPr>
+                <a:solidFill>
+                  <a:srgbClr val="003B4F"/>
+                </a:solidFill>
+                <a:latin typeface="Courier"/>
+              </a:rPr>
+              <a:t>(</a:t>
+            </a:r>
+            <a:r>
+              <a:rPr>
+                <a:solidFill>
+                  <a:srgbClr val="657422"/>
+                </a:solidFill>
+                <a:latin typeface="Courier"/>
+              </a:rPr>
+              <a:t>group =</a:t>
+            </a:r>
+            <a:r>
+              <a:rPr>
+                <a:solidFill>
+                  <a:srgbClr val="003B4F"/>
+                </a:solidFill>
+                <a:latin typeface="Courier"/>
+              </a:rPr>
+              <a:t> Chick)) </a:t>
+            </a:r>
+            <a:r>
+              <a:rPr>
+                <a:solidFill>
+                  <a:srgbClr val="5E5E5E"/>
+                </a:solidFill>
+                <a:latin typeface="Courier"/>
+              </a:rPr>
+              <a:t>+</a:t>
+            </a:r>
+            <a:br/>
+            <a:r>
+              <a:rPr>
+                <a:solidFill>
+                  <a:srgbClr val="003B4F"/>
+                </a:solidFill>
+                <a:latin typeface="Courier"/>
+              </a:rPr>
+              <a:t>  </a:t>
+            </a:r>
+            <a:r>
+              <a:rPr>
+                <a:solidFill>
+                  <a:srgbClr val="4758AB"/>
+                </a:solidFill>
+                <a:latin typeface="Courier"/>
+              </a:rPr>
+              <a:t>labs</a:t>
+            </a:r>
+            <a:r>
+              <a:rPr>
+                <a:solidFill>
+                  <a:srgbClr val="003B4F"/>
+                </a:solidFill>
+                <a:latin typeface="Courier"/>
+              </a:rPr>
+              <a:t>(</a:t>
+            </a:r>
+            <a:r>
+              <a:rPr>
+                <a:solidFill>
+                  <a:srgbClr val="657422"/>
+                </a:solidFill>
+                <a:latin typeface="Courier"/>
+              </a:rPr>
+              <a:t>title =</a:t>
+            </a:r>
+            <a:r>
+              <a:rPr>
+                <a:solidFill>
+                  <a:srgbClr val="003B4F"/>
+                </a:solidFill>
+                <a:latin typeface="Courier"/>
+              </a:rPr>
+              <a:t> </a:t>
+            </a:r>
+            <a:r>
+              <a:rPr>
+                <a:solidFill>
+                  <a:srgbClr val="20794D"/>
+                </a:solidFill>
+                <a:latin typeface="Courier"/>
+              </a:rPr>
+              <a:t>"Chick Growth Over Time"</a:t>
+            </a:r>
+            <a:r>
+              <a:rPr>
+                <a:solidFill>
+                  <a:srgbClr val="003B4F"/>
+                </a:solidFill>
+                <a:latin typeface="Courier"/>
+              </a:rPr>
+              <a:t>)</a:t>
+            </a:r>
+            <a:br/>
+            <a:r>
+              <a:rPr>
+                <a:solidFill>
+                  <a:srgbClr val="5E5E5E"/>
+                </a:solidFill>
+                <a:latin typeface="Courier"/>
+              </a:rPr>
+              <a:t>```</a:t>
+            </a:r>
+          </a:p>
         </p:txBody>
       </p:sp>
     </p:spTree>
@@ -20683,7 +21021,7 @@
             </a:r>
             <a:r>
               <a:rPr/>
-              <a:t>, paste it into the Quarto docuement and place the cursor at the end of the sentence. This where in the sentence you want to place the citation.</a:t>
+              <a:t>, paste it into the Quarto document and place the cursor at the end of the sentence. This where in the sentence you want to place the citation.</a:t>
             </a:r>
           </a:p>
         </p:txBody>
@@ -21455,7 +21793,7 @@
             <a:pPr lvl="0"/>
             <a:r>
               <a:rPr/>
-              <a:t>You can publish to:</a:t>
+              <a:t>You can publish the rendered html file to:</a:t>
             </a:r>
           </a:p>
           <a:p>
@@ -21477,6 +21815,13 @@
             <a:r>
               <a:rPr/>
               <a:t>Quarto Pub</a:t>
+            </a:r>
+          </a:p>
+          <a:p>
+            <a:pPr lvl="0"/>
+            <a:r>
+              <a:rPr/>
+              <a:t>Note: Of course you can always render to PDF and upload that to any preprint server or your personal website. But here we will focus on publishing to GitHub Pages.</a:t>
             </a:r>
           </a:p>
           <a:p>
@@ -21715,6 +22060,55 @@
                       </p:childTnLst>
                     </p:cTn>
                   </p:par>
+                  <p:par>
+                    <p:cTn id="19" fill="hold">
+                      <p:stCondLst>
+                        <p:cond delay="indefinite"/>
+                      </p:stCondLst>
+                      <p:childTnLst>
+                        <p:par>
+                          <p:cTn id="20" fill="hold">
+                            <p:stCondLst>
+                              <p:cond delay="0"/>
+                            </p:stCondLst>
+                            <p:childTnLst>
+                              <p:par>
+                                <p:cTn id="21" presetID="1" presetClass="entr" presetSubtype="0" fill="hold" grpId="0" nodeType="clickEffect">
+                                  <p:stCondLst>
+                                    <p:cond delay="0"/>
+                                  </p:stCondLst>
+                                  <p:childTnLst>
+                                    <p:set>
+                                      <p:cBhvr>
+                                        <p:cTn id="22" dur="1" fill="hold">
+                                          <p:stCondLst>
+                                            <p:cond delay="0"/>
+                                          </p:stCondLst>
+                                        </p:cTn>
+                                        <p:tgtEl>
+                                          <p:spTgt spid="3">
+                                            <p:txEl>
+                                              <p:pRg st="7" end="7"/>
+                                            </p:txEl>
+                                          </p:spTgt>
+                                        </p:tgtEl>
+                                        <p:attrNameLst>
+                                          <p:attrName>style.visibility</p:attrName>
+                                        </p:attrNameLst>
+                                      </p:cBhvr>
+                                      <p:to>
+                                        <p:strVal val="visible"/>
+                                      </p:to>
+                                    </p:set>
+                                  </p:childTnLst>
+                                </p:cTn>
+                              </p:par>
+                            </p:childTnLst>
+                          </p:cTn>
+                        </p:par>
+                      </p:childTnLst>
+                    </p:cTn>
+                  </p:par>
                 </p:childTnLst>
               </p:cTn>
               <p:prevCondLst>
@@ -22420,7 +22814,7 @@
             </a:r>
             <a:r>
               <a:rPr/>
-              <a:t> directory and checking it into your repository</a:t>
+              <a:t> directory and pushing it to your repository</a:t>
             </a:r>
           </a:p>
           <a:p>

--- a/materials/OS-M3/OS-M3-S6-Quarto/OS-M3-S6-Quarto-slides.pptx
+++ b/materials/OS-M3/OS-M3-S6-Quarto/OS-M3-S6-Quarto-slides.pptx
@@ -12938,7 +12938,7 @@
             </a:pPr>
             <a:r>
               <a:rPr/>
-              <a:t>10/04/2026</a:t>
+              <a:t>12/04/2026</a:t>
             </a:r>
           </a:p>
         </p:txBody>

--- a/materials/OS-M3/OS-M3-S6-Quarto/OS-M3-S6-Quarto-slides.pptx
+++ b/materials/OS-M3/OS-M3-S6-Quarto/OS-M3-S6-Quarto-slides.pptx
@@ -12938,7 +12938,7 @@
             </a:pPr>
             <a:r>
               <a:rPr/>
-              <a:t>12/04/2026</a:t>
+              <a:t>15/04/2026</a:t>
             </a:r>
           </a:p>
         </p:txBody>

--- a/materials/OS-M3/OS-M3-S6-Quarto/OS-M3-S6-Quarto-slides.pptx
+++ b/materials/OS-M3/OS-M3-S6-Quarto/OS-M3-S6-Quarto-slides.pptx
@@ -12931,7 +12931,7 @@
             </a:pPr>
             <a:r>
               <a:rPr/>
-              <a:t>15/04/2026</a:t>
+              <a:t>19/04/2026</a:t>
             </a:r>
           </a:p>
         </p:txBody>

--- a/materials/OS-M3/OS-M3-S6-Quarto/OS-M3-S6-Quarto-slides.pptx
+++ b/materials/OS-M3/OS-M3-S6-Quarto/OS-M3-S6-Quarto-slides.pptx
@@ -12931,7 +12931,7 @@
             </a:pPr>
             <a:r>
               <a:rPr/>
-              <a:t>19/04/2026</a:t>
+              <a:t>26/04/2026</a:t>
             </a:r>
           </a:p>
         </p:txBody>

--- a/materials/OS-M3/OS-M3-S6-Quarto/OS-M3-S6-Quarto-slides.pptx
+++ b/materials/OS-M3/OS-M3-S6-Quarto/OS-M3-S6-Quarto-slides.pptx
@@ -12931,7 +12931,7 @@
             </a:pPr>
             <a:r>
               <a:rPr/>
-              <a:t>26/04/2026</a:t>
+              <a:t>29/04/2026</a:t>
             </a:r>
           </a:p>
         </p:txBody>

--- a/materials/OS-M3/OS-M3-S6-Quarto/OS-M3-S6-Quarto-slides.pptx
+++ b/materials/OS-M3/OS-M3-S6-Quarto/OS-M3-S6-Quarto-slides.pptx
@@ -12931,7 +12931,7 @@
             </a:pPr>
             <a:r>
               <a:rPr/>
-              <a:t>29/04/2026</a:t>
+              <a:t>03/05/2026</a:t>
             </a:r>
           </a:p>
         </p:txBody>

--- a/materials/OS-M3/OS-M3-S6-Quarto/OS-M3-S6-Quarto-slides.pptx
+++ b/materials/OS-M3/OS-M3-S6-Quarto/OS-M3-S6-Quarto-slides.pptx
@@ -12931,7 +12931,7 @@
             </a:pPr>
             <a:r>
               <a:rPr/>
-              <a:t>03/05/2026</a:t>
+              <a:t>06/05/2026</a:t>
             </a:r>
           </a:p>
         </p:txBody>

--- a/materials/OS-M3/OS-M3-S6-Quarto/OS-M3-S6-Quarto-slides.pptx
+++ b/materials/OS-M3/OS-M3-S6-Quarto/OS-M3-S6-Quarto-slides.pptx
@@ -12931,7 +12931,7 @@
             </a:pPr>
             <a:r>
               <a:rPr/>
-              <a:t>06/05/2026</a:t>
+              <a:t>12/05/2026</a:t>
             </a:r>
           </a:p>
         </p:txBody>

--- a/materials/OS-M3/OS-M3-S6-Quarto/OS-M3-S6-Quarto-slides.pptx
+++ b/materials/OS-M3/OS-M3-S6-Quarto/OS-M3-S6-Quarto-slides.pptx
@@ -12931,7 +12931,7 @@
             </a:pPr>
             <a:r>
               <a:rPr/>
-              <a:t>12/05/2026</a:t>
+              <a:t>17/05/2026</a:t>
             </a:r>
           </a:p>
         </p:txBody>

--- a/materials/OS-M3/OS-M3-S6-Quarto/OS-M3-S6-Quarto-slides.pptx
+++ b/materials/OS-M3/OS-M3-S6-Quarto/OS-M3-S6-Quarto-slides.pptx
@@ -12931,7 +12931,7 @@
             </a:pPr>
             <a:r>
               <a:rPr/>
-              <a:t>17/05/2026</a:t>
+              <a:t>20/05/2026</a:t>
             </a:r>
           </a:p>
         </p:txBody>

--- a/materials/OS-M3/OS-M3-S6-Quarto/OS-M3-S6-Quarto-slides.pptx
+++ b/materials/OS-M3/OS-M3-S6-Quarto/OS-M3-S6-Quarto-slides.pptx
@@ -12931,7 +12931,7 @@
             </a:pPr>
             <a:r>
               <a:rPr/>
-              <a:t>20/05/2026</a:t>
+              <a:t>25/05/2026</a:t>
             </a:r>
           </a:p>
         </p:txBody>

--- a/materials/OS-M3/OS-M3-S6-Quarto/OS-M3-S6-Quarto-slides.pptx
+++ b/materials/OS-M3/OS-M3-S6-Quarto/OS-M3-S6-Quarto-slides.pptx
@@ -12931,7 +12931,7 @@
             </a:pPr>
             <a:r>
               <a:rPr/>
-              <a:t>25/05/2026</a:t>
+              <a:t>01/06/2026</a:t>
             </a:r>
           </a:p>
         </p:txBody>

--- a/materials/OS-M3/OS-M3-S6-Quarto/OS-M3-S6-Quarto-slides.pptx
+++ b/materials/OS-M3/OS-M3-S6-Quarto/OS-M3-S6-Quarto-slides.pptx
@@ -12931,7 +12931,7 @@
             </a:pPr>
             <a:r>
               <a:rPr/>
-              <a:t>01/06/2026</a:t>
+              <a:t>08/06/2026</a:t>
             </a:r>
           </a:p>
         </p:txBody>

--- a/materials/OS-M3/OS-M3-S6-Quarto/OS-M3-S6-Quarto-slides.pptx
+++ b/materials/OS-M3/OS-M3-S6-Quarto/OS-M3-S6-Quarto-slides.pptx
@@ -12931,7 +12931,7 @@
             </a:pPr>
             <a:r>
               <a:rPr/>
-              <a:t>08/06/2026</a:t>
+              <a:t>09/06/2026</a:t>
             </a:r>
           </a:p>
         </p:txBody>

--- a/materials/OS-M3/OS-M3-S6-Quarto/OS-M3-S6-Quarto-slides.pptx
+++ b/materials/OS-M3/OS-M3-S6-Quarto/OS-M3-S6-Quarto-slides.pptx
@@ -12931,7 +12931,7 @@
             </a:pPr>
             <a:r>
               <a:rPr/>
-              <a:t>09/06/2026</a:t>
+              <a:t>15/06/2026</a:t>
             </a:r>
           </a:p>
         </p:txBody>

--- a/materials/OS-M3/OS-M3-S6-Quarto/OS-M3-S6-Quarto-slides.pptx
+++ b/materials/OS-M3/OS-M3-S6-Quarto/OS-M3-S6-Quarto-slides.pptx
@@ -12931,7 +12931,7 @@
             </a:pPr>
             <a:r>
               <a:rPr/>
-              <a:t>15/06/2026</a:t>
+              <a:t>22/06/2026</a:t>
             </a:r>
           </a:p>
         </p:txBody>

--- a/materials/OS-M3/OS-M3-S6-Quarto/OS-M3-S6-Quarto-slides.pptx
+++ b/materials/OS-M3/OS-M3-S6-Quarto/OS-M3-S6-Quarto-slides.pptx
@@ -12931,7 +12931,7 @@
             </a:pPr>
             <a:r>
               <a:rPr/>
-              <a:t>22/06/2026</a:t>
+              <a:t>29/06/2026</a:t>
             </a:r>
           </a:p>
         </p:txBody>

--- a/materials/OS-M3/OS-M3-S6-Quarto/OS-M3-S6-Quarto-slides.pptx
+++ b/materials/OS-M3/OS-M3-S6-Quarto/OS-M3-S6-Quarto-slides.pptx
@@ -12931,7 +12931,7 @@
             </a:pPr>
             <a:r>
               <a:rPr/>
-              <a:t>29/06/2026</a:t>
+              <a:t>06/07/2026</a:t>
             </a:r>
           </a:p>
         </p:txBody>

--- a/materials/OS-M3/OS-M3-S6-Quarto/OS-M3-S6-Quarto-slides.pptx
+++ b/materials/OS-M3/OS-M3-S6-Quarto/OS-M3-S6-Quarto-slides.pptx
@@ -12931,7 +12931,7 @@
             </a:pPr>
             <a:r>
               <a:rPr/>
-              <a:t>06/07/2026</a:t>
+              <a:t>12/07/2026</a:t>
             </a:r>
           </a:p>
         </p:txBody>

--- a/materials/OS-M3/OS-M3-S6-Quarto/OS-M3-S6-Quarto-slides.pptx
+++ b/materials/OS-M3/OS-M3-S6-Quarto/OS-M3-S6-Quarto-slides.pptx
@@ -12931,7 +12931,7 @@
             </a:pPr>
             <a:r>
               <a:rPr/>
-              <a:t>12/07/2026</a:t>
+              <a:t>17/07/2026</a:t>
             </a:r>
           </a:p>
         </p:txBody>

--- a/materials/OS-M3/OS-M3-S6-Quarto/OS-M3-S6-Quarto-slides.pptx
+++ b/materials/OS-M3/OS-M3-S6-Quarto/OS-M3-S6-Quarto-slides.pptx
@@ -12931,7 +12931,7 @@
             </a:pPr>
             <a:r>
               <a:rPr/>
-              <a:t>17/07/2026</a:t>
+              <a:t>20/07/2026</a:t>
             </a:r>
           </a:p>
         </p:txBody>

--- a/materials/OS-M3/OS-M3-S6-Quarto/OS-M3-S6-Quarto-slides.pptx
+++ b/materials/OS-M3/OS-M3-S6-Quarto/OS-M3-S6-Quarto-slides.pptx
@@ -12931,7 +12931,7 @@
             </a:pPr>
             <a:r>
               <a:rPr/>
-              <a:t>20/07/2026</a:t>
+              <a:t>22/07/2026</a:t>
             </a:r>
           </a:p>
         </p:txBody>

--- a/materials/OS-M3/OS-M3-S6-Quarto/OS-M3-S6-Quarto-slides.pptx
+++ b/materials/OS-M3/OS-M3-S6-Quarto/OS-M3-S6-Quarto-slides.pptx
@@ -12931,7 +12931,7 @@
             </a:pPr>
             <a:r>
               <a:rPr/>
-              <a:t>22/07/2026</a:t>
+              <a:t>23/07/2026</a:t>
             </a:r>
           </a:p>
         </p:txBody>

--- a/materials/OS-M3/OS-M3-S6-Quarto/OS-M3-S6-Quarto-slides.pptx
+++ b/materials/OS-M3/OS-M3-S6-Quarto/OS-M3-S6-Quarto-slides.pptx
@@ -12931,7 +12931,7 @@
             </a:pPr>
             <a:r>
               <a:rPr/>
-              <a:t>23/07/2026</a:t>
+              <a:t>26/07/2026</a:t>
             </a:r>
           </a:p>
         </p:txBody>

--- a/materials/OS-M3/OS-M3-S6-Quarto/OS-M3-S6-Quarto-slides.pptx
+++ b/materials/OS-M3/OS-M3-S6-Quarto/OS-M3-S6-Quarto-slides.pptx
@@ -12931,7 +12931,7 @@
             </a:pPr>
             <a:r>
               <a:rPr/>
-              <a:t>26/07/2026</a:t>
+              <a:t>03/08/2026</a:t>
             </a:r>
           </a:p>
         </p:txBody>

--- a/materials/OS-M3/OS-M3-S6-Quarto/OS-M3-S6-Quarto-slides.pptx
+++ b/materials/OS-M3/OS-M3-S6-Quarto/OS-M3-S6-Quarto-slides.pptx
@@ -12931,7 +12931,7 @@
             </a:pPr>
             <a:r>
               <a:rPr/>
-              <a:t>03/08/2026</a:t>
+              <a:t>04/08/2026</a:t>
             </a:r>
           </a:p>
         </p:txBody>

--- a/materials/OS-M3/OS-M3-S6-Quarto/OS-M3-S6-Quarto-slides.pptx
+++ b/materials/OS-M3/OS-M3-S6-Quarto/OS-M3-S6-Quarto-slides.pptx
@@ -12931,7 +12931,7 @@
             </a:pPr>
             <a:r>
               <a:rPr/>
-              <a:t>04/08/2026</a:t>
+              <a:t>09/08/2026</a:t>
             </a:r>
           </a:p>
         </p:txBody>

--- a/materials/OS-M3/OS-M3-S6-Quarto/OS-M3-S6-Quarto-slides.pptx
+++ b/materials/OS-M3/OS-M3-S6-Quarto/OS-M3-S6-Quarto-slides.pptx
@@ -12931,7 +12931,7 @@
             </a:pPr>
             <a:r>
               <a:rPr/>
-              <a:t>09/08/2026</a:t>
+              <a:t>10/08/2026</a:t>
             </a:r>
           </a:p>
         </p:txBody>

--- a/materials/OS-M3/OS-M3-S6-Quarto/OS-M3-S6-Quarto-slides.pptx
+++ b/materials/OS-M3/OS-M3-S6-Quarto/OS-M3-S6-Quarto-slides.pptx
@@ -12931,7 +12931,7 @@
             </a:pPr>
             <a:r>
               <a:rPr/>
-              <a:t>10/08/2026</a:t>
+              <a:t>12/08/2026</a:t>
             </a:r>
           </a:p>
         </p:txBody>

--- a/materials/OS-M3/OS-M3-S6-Quarto/OS-M3-S6-Quarto-slides.pptx
+++ b/materials/OS-M3/OS-M3-S6-Quarto/OS-M3-S6-Quarto-slides.pptx
@@ -12931,7 +12931,7 @@
             </a:pPr>
             <a:r>
               <a:rPr/>
-              <a:t>12/08/2026</a:t>
+              <a:t>13/08/2026</a:t>
             </a:r>
           </a:p>
         </p:txBody>

--- a/materials/OS-M3/OS-M3-S6-Quarto/OS-M3-S6-Quarto-slides.pptx
+++ b/materials/OS-M3/OS-M3-S6-Quarto/OS-M3-S6-Quarto-slides.pptx
@@ -12931,7 +12931,7 @@
             </a:pPr>
             <a:r>
               <a:rPr/>
-              <a:t>13/08/2026</a:t>
+              <a:t>16/08/2026</a:t>
             </a:r>
           </a:p>
         </p:txBody>

--- a/materials/OS-M3/OS-M3-S6-Quarto/OS-M3-S6-Quarto-slides.pptx
+++ b/materials/OS-M3/OS-M3-S6-Quarto/OS-M3-S6-Quarto-slides.pptx
@@ -12931,7 +12931,7 @@
             </a:pPr>
             <a:r>
               <a:rPr/>
-              <a:t>16/08/2026</a:t>
+              <a:t>23/08/2026</a:t>
             </a:r>
           </a:p>
         </p:txBody>

--- a/materials/OS-M3/OS-M3-S6-Quarto/OS-M3-S6-Quarto-slides.pptx
+++ b/materials/OS-M3/OS-M3-S6-Quarto/OS-M3-S6-Quarto-slides.pptx
@@ -12931,7 +12931,7 @@
             </a:pPr>
             <a:r>
               <a:rPr/>
-              <a:t>23/08/2026</a:t>
+              <a:t>31/08/2026</a:t>
             </a:r>
           </a:p>
         </p:txBody>
